--- a/data-eng/decks/w7d4s2.pptx
+++ b/data-eng/decks/w7d4s2.pptx
@@ -3099,7 +3099,7 @@
       <p:grpSpPr/>
       <p:sp>
         <p:nvSpPr>
-          <p:cNvPr id="2" name="Oval 1"/>
+          <p:cNvPr id="2" name="deckgen:decor"/>
           <p:cNvSpPr/>
           <p:nvPr/>
         </p:nvSpPr>
@@ -3129,7 +3129,7 @@
       </p:sp>
       <p:sp>
         <p:nvSpPr>
-          <p:cNvPr id="3" name="Oval 2"/>
+          <p:cNvPr id="3" name="deckgen:decor"/>
           <p:cNvSpPr/>
           <p:nvPr/>
         </p:nvSpPr>
@@ -3159,7 +3159,7 @@
       </p:sp>
       <p:sp>
         <p:nvSpPr>
-          <p:cNvPr id="4" name="Oval 3"/>
+          <p:cNvPr id="4" name="deckgen:decor"/>
           <p:cNvSpPr/>
           <p:nvPr/>
         </p:nvSpPr>
@@ -3189,7 +3189,7 @@
       </p:sp>
       <p:sp>
         <p:nvSpPr>
-          <p:cNvPr id="5" name="Rectangle 4"/>
+          <p:cNvPr id="5" name="deckgen:decor"/>
           <p:cNvSpPr/>
           <p:nvPr/>
         </p:nvSpPr>
@@ -3219,7 +3219,7 @@
       </p:sp>
       <p:sp>
         <p:nvSpPr>
-          <p:cNvPr id="6" name="Oval 5"/>
+          <p:cNvPr id="6" name="deckgen:decor"/>
           <p:cNvSpPr/>
           <p:nvPr/>
         </p:nvSpPr>
@@ -3249,7 +3249,7 @@
       </p:sp>
       <p:sp>
         <p:nvSpPr>
-          <p:cNvPr id="7" name="Oval 6"/>
+          <p:cNvPr id="7" name="deckgen:decor"/>
           <p:cNvSpPr/>
           <p:nvPr/>
         </p:nvSpPr>
@@ -3279,7 +3279,7 @@
       </p:sp>
       <p:sp>
         <p:nvSpPr>
-          <p:cNvPr id="8" name="Oval 7"/>
+          <p:cNvPr id="8" name="deckgen:decor"/>
           <p:cNvSpPr/>
           <p:nvPr/>
         </p:nvSpPr>
@@ -3309,7 +3309,7 @@
       </p:sp>
       <p:sp>
         <p:nvSpPr>
-          <p:cNvPr id="9" name="Oval 8"/>
+          <p:cNvPr id="9" name="deckgen:decor"/>
           <p:cNvSpPr/>
           <p:nvPr/>
         </p:nvSpPr>
@@ -3339,7 +3339,7 @@
       </p:sp>
       <p:sp>
         <p:nvSpPr>
-          <p:cNvPr id="10" name="Rectangle 9"/>
+          <p:cNvPr id="10" name="deckgen:decor"/>
           <p:cNvSpPr/>
           <p:nvPr/>
         </p:nvSpPr>
@@ -3617,7 +3617,7 @@
       <p:grpSpPr/>
       <p:sp>
         <p:nvSpPr>
-          <p:cNvPr id="2" name="Oval 1"/>
+          <p:cNvPr id="2" name="deckgen:decor"/>
           <p:cNvSpPr/>
           <p:nvPr/>
         </p:nvSpPr>
@@ -3647,7 +3647,7 @@
       </p:sp>
       <p:sp>
         <p:nvSpPr>
-          <p:cNvPr id="3" name="Oval 2"/>
+          <p:cNvPr id="3" name="deckgen:decor"/>
           <p:cNvSpPr/>
           <p:nvPr/>
         </p:nvSpPr>
@@ -4424,7 +4424,7 @@
       <p:grpSpPr/>
       <p:sp>
         <p:nvSpPr>
-          <p:cNvPr id="2" name="Oval 1"/>
+          <p:cNvPr id="2" name="deckgen:decor"/>
           <p:cNvSpPr/>
           <p:nvPr/>
         </p:nvSpPr>
@@ -4454,7 +4454,7 @@
       </p:sp>
       <p:sp>
         <p:nvSpPr>
-          <p:cNvPr id="3" name="Oval 2"/>
+          <p:cNvPr id="3" name="deckgen:decor"/>
           <p:cNvSpPr/>
           <p:nvPr/>
         </p:nvSpPr>
@@ -4484,7 +4484,7 @@
       </p:sp>
       <p:sp>
         <p:nvSpPr>
-          <p:cNvPr id="4" name="Oval 3"/>
+          <p:cNvPr id="4" name="deckgen:decor"/>
           <p:cNvSpPr/>
           <p:nvPr/>
         </p:nvSpPr>
@@ -5415,7 +5415,7 @@
       <p:grpSpPr/>
       <p:sp>
         <p:nvSpPr>
-          <p:cNvPr id="2" name="Oval 1"/>
+          <p:cNvPr id="2" name="deckgen:decor"/>
           <p:cNvSpPr/>
           <p:nvPr/>
         </p:nvSpPr>
@@ -5445,7 +5445,7 @@
       </p:sp>
       <p:sp>
         <p:nvSpPr>
-          <p:cNvPr id="3" name="Oval 2"/>
+          <p:cNvPr id="3" name="deckgen:decor"/>
           <p:cNvSpPr/>
           <p:nvPr/>
         </p:nvSpPr>
@@ -5475,7 +5475,7 @@
       </p:sp>
       <p:sp>
         <p:nvSpPr>
-          <p:cNvPr id="4" name="Oval 3"/>
+          <p:cNvPr id="4" name="deckgen:decor"/>
           <p:cNvSpPr/>
           <p:nvPr/>
         </p:nvSpPr>
@@ -6590,7 +6590,7 @@
       <p:grpSpPr/>
       <p:sp>
         <p:nvSpPr>
-          <p:cNvPr id="2" name="Oval 1"/>
+          <p:cNvPr id="2" name="deckgen:decor"/>
           <p:cNvSpPr/>
           <p:nvPr/>
         </p:nvSpPr>
@@ -6620,7 +6620,7 @@
       </p:sp>
       <p:sp>
         <p:nvSpPr>
-          <p:cNvPr id="3" name="Oval 2"/>
+          <p:cNvPr id="3" name="deckgen:decor"/>
           <p:cNvSpPr/>
           <p:nvPr/>
         </p:nvSpPr>
@@ -6650,7 +6650,7 @@
       </p:sp>
       <p:sp>
         <p:nvSpPr>
-          <p:cNvPr id="4" name="Oval 3"/>
+          <p:cNvPr id="4" name="deckgen:decor"/>
           <p:cNvSpPr/>
           <p:nvPr/>
         </p:nvSpPr>
@@ -7752,7 +7752,7 @@
                 <a:ea typeface="Pretendard"/>
                 <a:cs typeface="Pretendard"/>
               </a:rPr>
-              <a:t>minio/minio server /data --console-address ":9001"</a:t>
+              <a:t>pgsty/minio server /data --console-address ":9001"</a:t>
             </a:r>
           </a:p>
         </p:txBody>
@@ -8046,7 +8046,7 @@
       <p:grpSpPr/>
       <p:sp>
         <p:nvSpPr>
-          <p:cNvPr id="2" name="Oval 1"/>
+          <p:cNvPr id="2" name="deckgen:decor"/>
           <p:cNvSpPr/>
           <p:nvPr/>
         </p:nvSpPr>
@@ -8076,7 +8076,7 @@
       </p:sp>
       <p:sp>
         <p:nvSpPr>
-          <p:cNvPr id="3" name="Oval 2"/>
+          <p:cNvPr id="3" name="deckgen:decor"/>
           <p:cNvSpPr/>
           <p:nvPr/>
         </p:nvSpPr>
@@ -8106,7 +8106,7 @@
       </p:sp>
       <p:sp>
         <p:nvSpPr>
-          <p:cNvPr id="4" name="Oval 3"/>
+          <p:cNvPr id="4" name="deckgen:decor"/>
           <p:cNvSpPr/>
           <p:nvPr/>
         </p:nvSpPr>
@@ -9260,7 +9260,7 @@
       <p:grpSpPr/>
       <p:sp>
         <p:nvSpPr>
-          <p:cNvPr id="2" name="Oval 1"/>
+          <p:cNvPr id="2" name="deckgen:decor"/>
           <p:cNvSpPr/>
           <p:nvPr/>
         </p:nvSpPr>
@@ -9290,7 +9290,7 @@
       </p:sp>
       <p:sp>
         <p:nvSpPr>
-          <p:cNvPr id="3" name="Oval 2"/>
+          <p:cNvPr id="3" name="deckgen:decor"/>
           <p:cNvSpPr/>
           <p:nvPr/>
         </p:nvSpPr>
@@ -9320,7 +9320,7 @@
       </p:sp>
       <p:sp>
         <p:nvSpPr>
-          <p:cNvPr id="4" name="Oval 3"/>
+          <p:cNvPr id="4" name="deckgen:decor"/>
           <p:cNvSpPr/>
           <p:nvPr/>
         </p:nvSpPr>
@@ -10321,7 +10321,7 @@
       <p:grpSpPr/>
       <p:sp>
         <p:nvSpPr>
-          <p:cNvPr id="2" name="Oval 1"/>
+          <p:cNvPr id="2" name="deckgen:decor"/>
           <p:cNvSpPr/>
           <p:nvPr/>
         </p:nvSpPr>
@@ -10351,7 +10351,7 @@
       </p:sp>
       <p:sp>
         <p:nvSpPr>
-          <p:cNvPr id="3" name="Oval 2"/>
+          <p:cNvPr id="3" name="deckgen:decor"/>
           <p:cNvSpPr/>
           <p:nvPr/>
         </p:nvSpPr>
@@ -10381,7 +10381,7 @@
       </p:sp>
       <p:sp>
         <p:nvSpPr>
-          <p:cNvPr id="4" name="Oval 3"/>
+          <p:cNvPr id="4" name="deckgen:decor"/>
           <p:cNvSpPr/>
           <p:nvPr/>
         </p:nvSpPr>
@@ -11535,7 +11535,7 @@
       <p:grpSpPr/>
       <p:sp>
         <p:nvSpPr>
-          <p:cNvPr id="2" name="Oval 1"/>
+          <p:cNvPr id="2" name="deckgen:decor"/>
           <p:cNvSpPr/>
           <p:nvPr/>
         </p:nvSpPr>
@@ -11565,7 +11565,7 @@
       </p:sp>
       <p:sp>
         <p:nvSpPr>
-          <p:cNvPr id="3" name="Oval 2"/>
+          <p:cNvPr id="3" name="deckgen:decor"/>
           <p:cNvSpPr/>
           <p:nvPr/>
         </p:nvSpPr>
@@ -11595,7 +11595,7 @@
       </p:sp>
       <p:sp>
         <p:nvSpPr>
-          <p:cNvPr id="4" name="Oval 3"/>
+          <p:cNvPr id="4" name="deckgen:decor"/>
           <p:cNvSpPr/>
           <p:nvPr/>
         </p:nvSpPr>
@@ -12596,7 +12596,7 @@
       <p:grpSpPr/>
       <p:sp>
         <p:nvSpPr>
-          <p:cNvPr id="2" name="Oval 1"/>
+          <p:cNvPr id="2" name="deckgen:decor"/>
           <p:cNvSpPr/>
           <p:nvPr/>
         </p:nvSpPr>
@@ -12626,7 +12626,7 @@
       </p:sp>
       <p:sp>
         <p:nvSpPr>
-          <p:cNvPr id="3" name="Oval 2"/>
+          <p:cNvPr id="3" name="deckgen:decor"/>
           <p:cNvSpPr/>
           <p:nvPr/>
         </p:nvSpPr>
@@ -12656,7 +12656,7 @@
       </p:sp>
       <p:sp>
         <p:nvSpPr>
-          <p:cNvPr id="4" name="Oval 3"/>
+          <p:cNvPr id="4" name="deckgen:decor"/>
           <p:cNvSpPr/>
           <p:nvPr/>
         </p:nvSpPr>
